--- a/standards/building-blocks/solution-building-block/example/components-and-summary.pptx
+++ b/standards/building-blocks/solution-building-block/example/components-and-summary.pptx
@@ -5,9 +5,9 @@
     <p:sldMasterId id="2147483648" r:id="rId1"/>
   </p:sldMasterIdLst>
   <p:sldIdLst>
-    <p:sldId id="256" r:id="rId7"/>
+    <p:sldId id="256" r:id="rId2"/>
   </p:sldIdLst>
-  <p:sldSz cx="12192000" cy="6858000" type="screen4x3"/>
+  <p:sldSz cx="12192000" cy="6858000"/>
   <p:notesSz cx="6858000" cy="9144000"/>
   <p:defaultTextStyle>
     <a:defPPr>
@@ -104,6 +104,22 @@
       </a:defRPr>
     </a:lvl9pPr>
   </p:defaultTextStyle>
+  <p:extLst>
+    <p:ext uri="{EFAFB233-063F-42B5-8137-9DF3F51BA10A}">
+      <p15:sldGuideLst xmlns:p15="http://schemas.microsoft.com/office/powerpoint/2012/main">
+        <p15:guide id="1" orient="horz" pos="2160">
+          <p15:clr>
+            <a:srgbClr val="A4A3A4"/>
+          </p15:clr>
+        </p15:guide>
+        <p15:guide id="2" pos="2880">
+          <p15:clr>
+            <a:srgbClr val="A4A3A4"/>
+          </p15:clr>
+        </p15:guide>
+      </p15:sldGuideLst>
+    </p:ext>
+  </p:extLst>
 </p:presentation>
 </file>
 
@@ -145,10 +161,9 @@
           <a:lstStyle/>
           <a:p>
             <a:r>
-              <a:rPr lang="en-US" smtClean="0"/>
+              <a:rPr lang="en-US"/>
               <a:t>Click to edit Master title style</a:t>
             </a:r>
-            <a:endParaRPr lang="en-US"/>
           </a:p>
         </p:txBody>
       </p:sp>
@@ -264,10 +279,9 @@
           </a:lstStyle>
           <a:p>
             <a:r>
-              <a:rPr lang="en-US" smtClean="0"/>
+              <a:rPr lang="en-US"/>
               <a:t>Click to edit Master subtitle style</a:t>
             </a:r>
-            <a:endParaRPr lang="en-US"/>
           </a:p>
         </p:txBody>
       </p:sp>
@@ -288,7 +302,7 @@
           <a:p>
             <a:fld id="{5BCAD085-E8A6-8845-BD4E-CB4CCA059FC4}" type="datetimeFigureOut">
               <a:rPr lang="en-US" smtClean="0"/>
-              <a:t>1/27/13</a:t>
+              <a:t>3/7/2026</a:t>
             </a:fld>
             <a:endParaRPr lang="en-US"/>
           </a:p>
@@ -382,10 +396,9 @@
           <a:lstStyle/>
           <a:p>
             <a:r>
-              <a:rPr lang="en-US" smtClean="0"/>
+              <a:rPr lang="en-US"/>
               <a:t>Click to edit Master title style</a:t>
             </a:r>
-            <a:endParaRPr lang="en-US"/>
           </a:p>
         </p:txBody>
       </p:sp>
@@ -406,38 +419,37 @@
           <a:p>
             <a:pPr lvl="0"/>
             <a:r>
-              <a:rPr lang="en-US" smtClean="0"/>
+              <a:rPr lang="en-US"/>
               <a:t>Click to edit Master text styles</a:t>
             </a:r>
           </a:p>
           <a:p>
             <a:pPr lvl="1"/>
             <a:r>
-              <a:rPr lang="en-US" smtClean="0"/>
+              <a:rPr lang="en-US"/>
               <a:t>Second level</a:t>
             </a:r>
           </a:p>
           <a:p>
             <a:pPr lvl="2"/>
             <a:r>
-              <a:rPr lang="en-US" smtClean="0"/>
+              <a:rPr lang="en-US"/>
               <a:t>Third level</a:t>
             </a:r>
           </a:p>
           <a:p>
             <a:pPr lvl="3"/>
             <a:r>
-              <a:rPr lang="en-US" smtClean="0"/>
+              <a:rPr lang="en-US"/>
               <a:t>Fourth level</a:t>
             </a:r>
           </a:p>
           <a:p>
             <a:pPr lvl="4"/>
             <a:r>
-              <a:rPr lang="en-US" smtClean="0"/>
+              <a:rPr lang="en-US"/>
               <a:t>Fifth level</a:t>
             </a:r>
-            <a:endParaRPr lang="en-US"/>
           </a:p>
         </p:txBody>
       </p:sp>
@@ -458,7 +470,7 @@
           <a:p>
             <a:fld id="{5BCAD085-E8A6-8845-BD4E-CB4CCA059FC4}" type="datetimeFigureOut">
               <a:rPr lang="en-US" smtClean="0"/>
-              <a:t>1/27/13</a:t>
+              <a:t>3/7/2026</a:t>
             </a:fld>
             <a:endParaRPr lang="en-US"/>
           </a:p>
@@ -557,10 +569,9 @@
           <a:lstStyle/>
           <a:p>
             <a:r>
-              <a:rPr lang="en-US" smtClean="0"/>
+              <a:rPr lang="en-US"/>
               <a:t>Click to edit Master title style</a:t>
             </a:r>
-            <a:endParaRPr lang="en-US"/>
           </a:p>
         </p:txBody>
       </p:sp>
@@ -586,38 +597,37 @@
           <a:p>
             <a:pPr lvl="0"/>
             <a:r>
-              <a:rPr lang="en-US" smtClean="0"/>
+              <a:rPr lang="en-US"/>
               <a:t>Click to edit Master text styles</a:t>
             </a:r>
           </a:p>
           <a:p>
             <a:pPr lvl="1"/>
             <a:r>
-              <a:rPr lang="en-US" smtClean="0"/>
+              <a:rPr lang="en-US"/>
               <a:t>Second level</a:t>
             </a:r>
           </a:p>
           <a:p>
             <a:pPr lvl="2"/>
             <a:r>
-              <a:rPr lang="en-US" smtClean="0"/>
+              <a:rPr lang="en-US"/>
               <a:t>Third level</a:t>
             </a:r>
           </a:p>
           <a:p>
             <a:pPr lvl="3"/>
             <a:r>
-              <a:rPr lang="en-US" smtClean="0"/>
+              <a:rPr lang="en-US"/>
               <a:t>Fourth level</a:t>
             </a:r>
           </a:p>
           <a:p>
             <a:pPr lvl="4"/>
             <a:r>
-              <a:rPr lang="en-US" smtClean="0"/>
+              <a:rPr lang="en-US"/>
               <a:t>Fifth level</a:t>
             </a:r>
-            <a:endParaRPr lang="en-US"/>
           </a:p>
         </p:txBody>
       </p:sp>
@@ -638,7 +648,7 @@
           <a:p>
             <a:fld id="{5BCAD085-E8A6-8845-BD4E-CB4CCA059FC4}" type="datetimeFigureOut">
               <a:rPr lang="en-US" smtClean="0"/>
-              <a:t>1/27/13</a:t>
+              <a:t>3/7/2026</a:t>
             </a:fld>
             <a:endParaRPr lang="en-US"/>
           </a:p>
@@ -732,10 +742,9 @@
           <a:lstStyle/>
           <a:p>
             <a:r>
-              <a:rPr lang="en-US" smtClean="0"/>
+              <a:rPr lang="en-US"/>
               <a:t>Click to edit Master title style</a:t>
             </a:r>
-            <a:endParaRPr lang="en-US"/>
           </a:p>
         </p:txBody>
       </p:sp>
@@ -756,38 +765,37 @@
           <a:p>
             <a:pPr lvl="0"/>
             <a:r>
-              <a:rPr lang="en-US" smtClean="0"/>
+              <a:rPr lang="en-US"/>
               <a:t>Click to edit Master text styles</a:t>
             </a:r>
           </a:p>
           <a:p>
             <a:pPr lvl="1"/>
             <a:r>
-              <a:rPr lang="en-US" smtClean="0"/>
+              <a:rPr lang="en-US"/>
               <a:t>Second level</a:t>
             </a:r>
           </a:p>
           <a:p>
             <a:pPr lvl="2"/>
             <a:r>
-              <a:rPr lang="en-US" smtClean="0"/>
+              <a:rPr lang="en-US"/>
               <a:t>Third level</a:t>
             </a:r>
           </a:p>
           <a:p>
             <a:pPr lvl="3"/>
             <a:r>
-              <a:rPr lang="en-US" smtClean="0"/>
+              <a:rPr lang="en-US"/>
               <a:t>Fourth level</a:t>
             </a:r>
           </a:p>
           <a:p>
             <a:pPr lvl="4"/>
             <a:r>
-              <a:rPr lang="en-US" smtClean="0"/>
+              <a:rPr lang="en-US"/>
               <a:t>Fifth level</a:t>
             </a:r>
-            <a:endParaRPr lang="en-US"/>
           </a:p>
         </p:txBody>
       </p:sp>
@@ -808,7 +816,7 @@
           <a:p>
             <a:fld id="{5BCAD085-E8A6-8845-BD4E-CB4CCA059FC4}" type="datetimeFigureOut">
               <a:rPr lang="en-US" smtClean="0"/>
-              <a:t>1/27/13</a:t>
+              <a:t>3/7/2026</a:t>
             </a:fld>
             <a:endParaRPr lang="en-US"/>
           </a:p>
@@ -911,10 +919,9 @@
           </a:lstStyle>
           <a:p>
             <a:r>
-              <a:rPr lang="en-US" smtClean="0"/>
+              <a:rPr lang="en-US"/>
               <a:t>Click to edit Master title style</a:t>
             </a:r>
-            <a:endParaRPr lang="en-US"/>
           </a:p>
         </p:txBody>
       </p:sp>
@@ -1031,7 +1038,7 @@
           <a:p>
             <a:pPr lvl="0"/>
             <a:r>
-              <a:rPr lang="en-US" smtClean="0"/>
+              <a:rPr lang="en-US"/>
               <a:t>Click to edit Master text styles</a:t>
             </a:r>
           </a:p>
@@ -1054,7 +1061,7 @@
           <a:p>
             <a:fld id="{5BCAD085-E8A6-8845-BD4E-CB4CCA059FC4}" type="datetimeFigureOut">
               <a:rPr lang="en-US" smtClean="0"/>
-              <a:t>1/27/13</a:t>
+              <a:t>3/7/2026</a:t>
             </a:fld>
             <a:endParaRPr lang="en-US"/>
           </a:p>
@@ -1148,10 +1155,9 @@
           <a:lstStyle/>
           <a:p>
             <a:r>
-              <a:rPr lang="en-US" smtClean="0"/>
+              <a:rPr lang="en-US"/>
               <a:t>Click to edit Master title style</a:t>
             </a:r>
-            <a:endParaRPr lang="en-US"/>
           </a:p>
         </p:txBody>
       </p:sp>
@@ -1205,38 +1211,37 @@
           <a:p>
             <a:pPr lvl="0"/>
             <a:r>
-              <a:rPr lang="en-US" smtClean="0"/>
+              <a:rPr lang="en-US"/>
               <a:t>Click to edit Master text styles</a:t>
             </a:r>
           </a:p>
           <a:p>
             <a:pPr lvl="1"/>
             <a:r>
-              <a:rPr lang="en-US" smtClean="0"/>
+              <a:rPr lang="en-US"/>
               <a:t>Second level</a:t>
             </a:r>
           </a:p>
           <a:p>
             <a:pPr lvl="2"/>
             <a:r>
-              <a:rPr lang="en-US" smtClean="0"/>
+              <a:rPr lang="en-US"/>
               <a:t>Third level</a:t>
             </a:r>
           </a:p>
           <a:p>
             <a:pPr lvl="3"/>
             <a:r>
-              <a:rPr lang="en-US" smtClean="0"/>
+              <a:rPr lang="en-US"/>
               <a:t>Fourth level</a:t>
             </a:r>
           </a:p>
           <a:p>
             <a:pPr lvl="4"/>
             <a:r>
-              <a:rPr lang="en-US" smtClean="0"/>
+              <a:rPr lang="en-US"/>
               <a:t>Fifth level</a:t>
             </a:r>
-            <a:endParaRPr lang="en-US"/>
           </a:p>
         </p:txBody>
       </p:sp>
@@ -1290,38 +1295,37 @@
           <a:p>
             <a:pPr lvl="0"/>
             <a:r>
-              <a:rPr lang="en-US" smtClean="0"/>
+              <a:rPr lang="en-US"/>
               <a:t>Click to edit Master text styles</a:t>
             </a:r>
           </a:p>
           <a:p>
             <a:pPr lvl="1"/>
             <a:r>
-              <a:rPr lang="en-US" smtClean="0"/>
+              <a:rPr lang="en-US"/>
               <a:t>Second level</a:t>
             </a:r>
           </a:p>
           <a:p>
             <a:pPr lvl="2"/>
             <a:r>
-              <a:rPr lang="en-US" smtClean="0"/>
+              <a:rPr lang="en-US"/>
               <a:t>Third level</a:t>
             </a:r>
           </a:p>
           <a:p>
             <a:pPr lvl="3"/>
             <a:r>
-              <a:rPr lang="en-US" smtClean="0"/>
+              <a:rPr lang="en-US"/>
               <a:t>Fourth level</a:t>
             </a:r>
           </a:p>
           <a:p>
             <a:pPr lvl="4"/>
             <a:r>
-              <a:rPr lang="en-US" smtClean="0"/>
+              <a:rPr lang="en-US"/>
               <a:t>Fifth level</a:t>
             </a:r>
-            <a:endParaRPr lang="en-US"/>
           </a:p>
         </p:txBody>
       </p:sp>
@@ -1342,7 +1346,7 @@
           <a:p>
             <a:fld id="{5BCAD085-E8A6-8845-BD4E-CB4CCA059FC4}" type="datetimeFigureOut">
               <a:rPr lang="en-US" smtClean="0"/>
-              <a:t>1/27/13</a:t>
+              <a:t>3/7/2026</a:t>
             </a:fld>
             <a:endParaRPr lang="en-US"/>
           </a:p>
@@ -1440,10 +1444,9 @@
           </a:lstStyle>
           <a:p>
             <a:r>
-              <a:rPr lang="en-US" smtClean="0"/>
+              <a:rPr lang="en-US"/>
               <a:t>Click to edit Master title style</a:t>
             </a:r>
-            <a:endParaRPr lang="en-US"/>
           </a:p>
         </p:txBody>
       </p:sp>
@@ -1506,7 +1509,7 @@
           <a:p>
             <a:pPr lvl="0"/>
             <a:r>
-              <a:rPr lang="en-US" smtClean="0"/>
+              <a:rPr lang="en-US"/>
               <a:t>Click to edit Master text styles</a:t>
             </a:r>
           </a:p>
@@ -1562,38 +1565,37 @@
           <a:p>
             <a:pPr lvl="0"/>
             <a:r>
-              <a:rPr lang="en-US" smtClean="0"/>
+              <a:rPr lang="en-US"/>
               <a:t>Click to edit Master text styles</a:t>
             </a:r>
           </a:p>
           <a:p>
             <a:pPr lvl="1"/>
             <a:r>
-              <a:rPr lang="en-US" smtClean="0"/>
+              <a:rPr lang="en-US"/>
               <a:t>Second level</a:t>
             </a:r>
           </a:p>
           <a:p>
             <a:pPr lvl="2"/>
             <a:r>
-              <a:rPr lang="en-US" smtClean="0"/>
+              <a:rPr lang="en-US"/>
               <a:t>Third level</a:t>
             </a:r>
           </a:p>
           <a:p>
             <a:pPr lvl="3"/>
             <a:r>
-              <a:rPr lang="en-US" smtClean="0"/>
+              <a:rPr lang="en-US"/>
               <a:t>Fourth level</a:t>
             </a:r>
           </a:p>
           <a:p>
             <a:pPr lvl="4"/>
             <a:r>
-              <a:rPr lang="en-US" smtClean="0"/>
+              <a:rPr lang="en-US"/>
               <a:t>Fifth level</a:t>
             </a:r>
-            <a:endParaRPr lang="en-US"/>
           </a:p>
         </p:txBody>
       </p:sp>
@@ -1656,7 +1658,7 @@
           <a:p>
             <a:pPr lvl="0"/>
             <a:r>
-              <a:rPr lang="en-US" smtClean="0"/>
+              <a:rPr lang="en-US"/>
               <a:t>Click to edit Master text styles</a:t>
             </a:r>
           </a:p>
@@ -1712,38 +1714,37 @@
           <a:p>
             <a:pPr lvl="0"/>
             <a:r>
-              <a:rPr lang="en-US" smtClean="0"/>
+              <a:rPr lang="en-US"/>
               <a:t>Click to edit Master text styles</a:t>
             </a:r>
           </a:p>
           <a:p>
             <a:pPr lvl="1"/>
             <a:r>
-              <a:rPr lang="en-US" smtClean="0"/>
+              <a:rPr lang="en-US"/>
               <a:t>Second level</a:t>
             </a:r>
           </a:p>
           <a:p>
             <a:pPr lvl="2"/>
             <a:r>
-              <a:rPr lang="en-US" smtClean="0"/>
+              <a:rPr lang="en-US"/>
               <a:t>Third level</a:t>
             </a:r>
           </a:p>
           <a:p>
             <a:pPr lvl="3"/>
             <a:r>
-              <a:rPr lang="en-US" smtClean="0"/>
+              <a:rPr lang="en-US"/>
               <a:t>Fourth level</a:t>
             </a:r>
           </a:p>
           <a:p>
             <a:pPr lvl="4"/>
             <a:r>
-              <a:rPr lang="en-US" smtClean="0"/>
+              <a:rPr lang="en-US"/>
               <a:t>Fifth level</a:t>
             </a:r>
-            <a:endParaRPr lang="en-US"/>
           </a:p>
         </p:txBody>
       </p:sp>
@@ -1764,7 +1765,7 @@
           <a:p>
             <a:fld id="{5BCAD085-E8A6-8845-BD4E-CB4CCA059FC4}" type="datetimeFigureOut">
               <a:rPr lang="en-US" smtClean="0"/>
-              <a:t>1/27/13</a:t>
+              <a:t>3/7/2026</a:t>
             </a:fld>
             <a:endParaRPr lang="en-US"/>
           </a:p>
@@ -1858,10 +1859,9 @@
           <a:lstStyle/>
           <a:p>
             <a:r>
-              <a:rPr lang="en-US" smtClean="0"/>
+              <a:rPr lang="en-US"/>
               <a:t>Click to edit Master title style</a:t>
             </a:r>
-            <a:endParaRPr lang="en-US"/>
           </a:p>
         </p:txBody>
       </p:sp>
@@ -1882,7 +1882,7 @@
           <a:p>
             <a:fld id="{5BCAD085-E8A6-8845-BD4E-CB4CCA059FC4}" type="datetimeFigureOut">
               <a:rPr lang="en-US" smtClean="0"/>
-              <a:t>1/27/13</a:t>
+              <a:t>3/7/2026</a:t>
             </a:fld>
             <a:endParaRPr lang="en-US"/>
           </a:p>
@@ -1977,7 +1977,7 @@
           <a:p>
             <a:fld id="{5BCAD085-E8A6-8845-BD4E-CB4CCA059FC4}" type="datetimeFigureOut">
               <a:rPr lang="en-US" smtClean="0"/>
-              <a:t>1/27/13</a:t>
+              <a:t>3/7/2026</a:t>
             </a:fld>
             <a:endParaRPr lang="en-US"/>
           </a:p>
@@ -2080,10 +2080,9 @@
           </a:lstStyle>
           <a:p>
             <a:r>
-              <a:rPr lang="en-US" smtClean="0"/>
+              <a:rPr lang="en-US"/>
               <a:t>Click to edit Master title style</a:t>
             </a:r>
-            <a:endParaRPr lang="en-US"/>
           </a:p>
         </p:txBody>
       </p:sp>
@@ -2137,38 +2136,37 @@
           <a:p>
             <a:pPr lvl="0"/>
             <a:r>
-              <a:rPr lang="en-US" smtClean="0"/>
+              <a:rPr lang="en-US"/>
               <a:t>Click to edit Master text styles</a:t>
             </a:r>
           </a:p>
           <a:p>
             <a:pPr lvl="1"/>
             <a:r>
-              <a:rPr lang="en-US" smtClean="0"/>
+              <a:rPr lang="en-US"/>
               <a:t>Second level</a:t>
             </a:r>
           </a:p>
           <a:p>
             <a:pPr lvl="2"/>
             <a:r>
-              <a:rPr lang="en-US" smtClean="0"/>
+              <a:rPr lang="en-US"/>
               <a:t>Third level</a:t>
             </a:r>
           </a:p>
           <a:p>
             <a:pPr lvl="3"/>
             <a:r>
-              <a:rPr lang="en-US" smtClean="0"/>
+              <a:rPr lang="en-US"/>
               <a:t>Fourth level</a:t>
             </a:r>
           </a:p>
           <a:p>
             <a:pPr lvl="4"/>
             <a:r>
-              <a:rPr lang="en-US" smtClean="0"/>
+              <a:rPr lang="en-US"/>
               <a:t>Fifth level</a:t>
             </a:r>
-            <a:endParaRPr lang="en-US"/>
           </a:p>
         </p:txBody>
       </p:sp>
@@ -2231,7 +2229,7 @@
           <a:p>
             <a:pPr lvl="0"/>
             <a:r>
-              <a:rPr lang="en-US" smtClean="0"/>
+              <a:rPr lang="en-US"/>
               <a:t>Click to edit Master text styles</a:t>
             </a:r>
           </a:p>
@@ -2254,7 +2252,7 @@
           <a:p>
             <a:fld id="{5BCAD085-E8A6-8845-BD4E-CB4CCA059FC4}" type="datetimeFigureOut">
               <a:rPr lang="en-US" smtClean="0"/>
-              <a:t>1/27/13</a:t>
+              <a:t>3/7/2026</a:t>
             </a:fld>
             <a:endParaRPr lang="en-US"/>
           </a:p>
@@ -2357,10 +2355,9 @@
           </a:lstStyle>
           <a:p>
             <a:r>
-              <a:rPr lang="en-US" smtClean="0"/>
+              <a:rPr lang="en-US"/>
               <a:t>Click to edit Master title style</a:t>
             </a:r>
-            <a:endParaRPr lang="en-US"/>
           </a:p>
         </p:txBody>
       </p:sp>
@@ -2484,7 +2481,7 @@
           <a:p>
             <a:pPr lvl="0"/>
             <a:r>
-              <a:rPr lang="en-US" smtClean="0"/>
+              <a:rPr lang="en-US"/>
               <a:t>Click to edit Master text styles</a:t>
             </a:r>
           </a:p>
@@ -2507,7 +2504,7 @@
           <a:p>
             <a:fld id="{5BCAD085-E8A6-8845-BD4E-CB4CCA059FC4}" type="datetimeFigureOut">
               <a:rPr lang="en-US" smtClean="0"/>
-              <a:t>1/27/13</a:t>
+              <a:t>3/7/2026</a:t>
             </a:fld>
             <a:endParaRPr lang="en-US"/>
           </a:p>
@@ -2616,10 +2613,9 @@
           <a:lstStyle/>
           <a:p>
             <a:r>
-              <a:rPr lang="en-US" smtClean="0"/>
+              <a:rPr lang="en-US"/>
               <a:t>Click to edit Master title style</a:t>
             </a:r>
-            <a:endParaRPr lang="en-US"/>
           </a:p>
         </p:txBody>
       </p:sp>
@@ -2650,38 +2646,37 @@
           <a:p>
             <a:pPr lvl="0"/>
             <a:r>
-              <a:rPr lang="en-US" smtClean="0"/>
+              <a:rPr lang="en-US"/>
               <a:t>Click to edit Master text styles</a:t>
             </a:r>
           </a:p>
           <a:p>
             <a:pPr lvl="1"/>
             <a:r>
-              <a:rPr lang="en-US" smtClean="0"/>
+              <a:rPr lang="en-US"/>
               <a:t>Second level</a:t>
             </a:r>
           </a:p>
           <a:p>
             <a:pPr lvl="2"/>
             <a:r>
-              <a:rPr lang="en-US" smtClean="0"/>
+              <a:rPr lang="en-US"/>
               <a:t>Third level</a:t>
             </a:r>
           </a:p>
           <a:p>
             <a:pPr lvl="3"/>
             <a:r>
-              <a:rPr lang="en-US" smtClean="0"/>
+              <a:rPr lang="en-US"/>
               <a:t>Fourth level</a:t>
             </a:r>
           </a:p>
           <a:p>
             <a:pPr lvl="4"/>
             <a:r>
-              <a:rPr lang="en-US" smtClean="0"/>
+              <a:rPr lang="en-US"/>
               <a:t>Fifth level</a:t>
             </a:r>
-            <a:endParaRPr lang="en-US"/>
           </a:p>
         </p:txBody>
       </p:sp>
@@ -2720,7 +2715,7 @@
           <a:p>
             <a:fld id="{5BCAD085-E8A6-8845-BD4E-CB4CCA059FC4}" type="datetimeFigureOut">
               <a:rPr lang="en-US" smtClean="0"/>
-              <a:t>1/27/13</a:t>
+              <a:t>3/7/2026</a:t>
             </a:fld>
             <a:endParaRPr lang="en-US"/>
           </a:p>
@@ -3079,7 +3074,7 @@
 </file>
 
 <file path=ppt/slides/slide1.xml><?xml version="1.0" encoding="utf-8"?>
-<p:sld xmlns:a="http://schemas.openxmlformats.org/drawingml/2006/main" xmlns:p="http://schemas.openxmlformats.org/presentationml/2006/main" xmlns:r="http://schemas.openxmlformats.org/officeDocument/2006/relationships">
+<p:sld xmlns:a="http://schemas.openxmlformats.org/drawingml/2006/main" xmlns:r="http://schemas.openxmlformats.org/officeDocument/2006/relationships" xmlns:p="http://schemas.openxmlformats.org/presentationml/2006/main">
   <p:cSld>
     <p:spTree>
       <p:nvGrpSpPr>
@@ -3087,7 +3082,14 @@
         <p:cNvGrpSpPr/>
         <p:nvPr/>
       </p:nvGrpSpPr>
-      <p:grpSpPr/>
+      <p:grpSpPr>
+        <a:xfrm>
+          <a:off x="0" y="0"/>
+          <a:ext cx="0" cy="0"/>
+          <a:chOff x="0" y="0"/>
+          <a:chExt cx="0" cy="0"/>
+        </a:xfrm>
+      </p:grpSpPr>
       <p:sp>
         <p:nvSpPr>
           <p:cNvPr id="2" name="TextBox 1"/>
@@ -3097,7 +3099,7 @@
         <p:spPr>
           <a:xfrm>
             <a:off x="287783" y="173111"/>
-            <a:ext cx="10515600" cy="558152"/>
+            <a:ext cx="10515600" cy="523220"/>
           </a:xfrm>
           <a:prstGeom prst="rect">
             <a:avLst/>
@@ -3112,13 +3114,31 @@
           <a:p>
             <a:pPr algn="l"/>
             <a:r>
-              <a:rPr sz="2800" b="1">
+              <a:rPr sz="2800" b="1" dirty="0">
                 <a:solidFill>
-                  <a:srgbClr val="4C1D95"/>
+                  <a:srgbClr val="1A1A2E"/>
                 </a:solidFill>
                 <a:latin typeface="Helvetica"/>
               </a:rPr>
-              <a:t>SBB: SB-011 Human-in-the-Loop via Microsoft Teams</a:t>
+              <a:t>SBB: SB-0</a:t>
+            </a:r>
+            <a:r>
+              <a:rPr lang="en-NZ" sz="2800" b="1" dirty="0">
+                <a:solidFill>
+                  <a:srgbClr val="1A1A2E"/>
+                </a:solidFill>
+                <a:latin typeface="Helvetica"/>
+              </a:rPr>
+              <a:t>04</a:t>
+            </a:r>
+            <a:r>
+              <a:rPr sz="2800" b="1" dirty="0">
+                <a:solidFill>
+                  <a:srgbClr val="1A1A2E"/>
+                </a:solidFill>
+                <a:latin typeface="Helvetica"/>
+              </a:rPr>
+              <a:t> Human-in-the-Loop via Microsoft Teams</a:t>
             </a:r>
           </a:p>
         </p:txBody>
@@ -3149,7 +3169,13 @@
       </p:pic>
       <p:pic>
         <p:nvPicPr>
-          <p:cNvPr id="4" name="Picture 3" descr="summary.png"/>
+          <p:cNvPr id="6" name="Picture 5">
+            <a:extLst>
+              <a:ext uri="{FF2B5EF4-FFF2-40B4-BE49-F238E27FC236}">
+                <a16:creationId xmlns:a16="http://schemas.microsoft.com/office/drawing/2014/main" id="{FD3CECC2-4752-52CA-D846-FFEF2AB4079C}"/>
+              </a:ext>
+            </a:extLst>
+          </p:cNvPr>
           <p:cNvPicPr>
             <a:picLocks noChangeAspect="1"/>
           </p:cNvPicPr>
@@ -3163,8 +3189,8 @@
         </p:blipFill>
         <p:spPr>
           <a:xfrm>
-            <a:off x="6516759" y="669618"/>
-            <a:ext cx="5387457" cy="5970613"/>
+            <a:off x="6507407" y="696331"/>
+            <a:ext cx="5226448" cy="5791286"/>
           </a:xfrm>
           <a:prstGeom prst="rect">
             <a:avLst/>
